--- a/Presentación.pptx
+++ b/Presentación.pptx
@@ -9,13 +9,15 @@
     <p:sldId id="257" r:id="rId3"/>
     <p:sldId id="258" r:id="rId4"/>
     <p:sldId id="261" r:id="rId5"/>
-    <p:sldId id="262" r:id="rId6"/>
-    <p:sldId id="263" r:id="rId7"/>
-    <p:sldId id="264" r:id="rId8"/>
-    <p:sldId id="265" r:id="rId9"/>
-    <p:sldId id="266" r:id="rId10"/>
-    <p:sldId id="267" r:id="rId11"/>
-    <p:sldId id="270" r:id="rId12"/>
+    <p:sldId id="272" r:id="rId6"/>
+    <p:sldId id="271" r:id="rId7"/>
+    <p:sldId id="262" r:id="rId8"/>
+    <p:sldId id="263" r:id="rId9"/>
+    <p:sldId id="264" r:id="rId10"/>
+    <p:sldId id="265" r:id="rId11"/>
+    <p:sldId id="266" r:id="rId12"/>
+    <p:sldId id="267" r:id="rId13"/>
+    <p:sldId id="270" r:id="rId14"/>
   </p:sldIdLst>
   <p:sldSz cx="9144000" cy="6858000" type="screen4x3"/>
   <p:notesSz cx="6858000" cy="9144000"/>
@@ -6022,6 +6024,169 @@
           <a:lstStyle/>
           <a:p>
             <a:r>
+              <a:t>Evaluación Final</a:t>
+            </a:r>
+          </a:p>
+        </p:txBody>
+      </p:sp>
+      <p:pic>
+        <p:nvPicPr>
+          <p:cNvPr id="7" name="Marcador de contenido 6">
+            <a:extLst>
+              <a:ext uri="{FF2B5EF4-FFF2-40B4-BE49-F238E27FC236}">
+                <a16:creationId xmlns:a16="http://schemas.microsoft.com/office/drawing/2014/main" id="{F18DA9D7-CACF-B58D-BC34-B3C3EF667FFC}"/>
+              </a:ext>
+            </a:extLst>
+          </p:cNvPr>
+          <p:cNvPicPr>
+            <a:picLocks noGrp="1" noChangeAspect="1"/>
+          </p:cNvPicPr>
+          <p:nvPr>
+            <p:ph idx="1"/>
+          </p:nvPr>
+        </p:nvPicPr>
+        <p:blipFill>
+          <a:blip r:embed="rId2"/>
+          <a:stretch>
+            <a:fillRect/>
+          </a:stretch>
+        </p:blipFill>
+        <p:spPr>
+          <a:xfrm>
+            <a:off x="1927797" y="1669948"/>
+            <a:ext cx="5288406" cy="4592034"/>
+          </a:xfrm>
+          <a:prstGeom prst="rect">
+            <a:avLst/>
+          </a:prstGeom>
+        </p:spPr>
+      </p:pic>
+    </p:spTree>
+  </p:cSld>
+  <p:clrMapOvr>
+    <a:masterClrMapping/>
+  </p:clrMapOvr>
+</p:sld>
+</file>
+
+<file path=ppt/slides/slide11.xml><?xml version="1.0" encoding="utf-8"?>
+<p:sld xmlns:a="http://schemas.openxmlformats.org/drawingml/2006/main" xmlns:r="http://schemas.openxmlformats.org/officeDocument/2006/relationships" xmlns:p="http://schemas.openxmlformats.org/presentationml/2006/main">
+  <p:cSld>
+    <p:spTree>
+      <p:nvGrpSpPr>
+        <p:cNvPr id="1" name=""/>
+        <p:cNvGrpSpPr/>
+        <p:nvPr/>
+      </p:nvGrpSpPr>
+      <p:grpSpPr>
+        <a:xfrm>
+          <a:off x="0" y="0"/>
+          <a:ext cx="0" cy="0"/>
+          <a:chOff x="0" y="0"/>
+          <a:chExt cx="0" cy="0"/>
+        </a:xfrm>
+      </p:grpSpPr>
+      <p:sp>
+        <p:nvSpPr>
+          <p:cNvPr id="2" name="Title 1"/>
+          <p:cNvSpPr>
+            <a:spLocks noGrp="1"/>
+          </p:cNvSpPr>
+          <p:nvPr>
+            <p:ph type="title"/>
+          </p:nvPr>
+        </p:nvSpPr>
+        <p:spPr/>
+        <p:txBody>
+          <a:bodyPr/>
+          <a:lstStyle/>
+          <a:p>
+            <a:r>
+              <a:t>Feature Importance</a:t>
+            </a:r>
+          </a:p>
+        </p:txBody>
+      </p:sp>
+      <p:sp>
+        <p:nvSpPr>
+          <p:cNvPr id="3" name="Content Placeholder 2"/>
+          <p:cNvSpPr>
+            <a:spLocks noGrp="1"/>
+          </p:cNvSpPr>
+          <p:nvPr>
+            <p:ph idx="1"/>
+          </p:nvPr>
+        </p:nvSpPr>
+        <p:spPr/>
+        <p:txBody>
+          <a:bodyPr/>
+          <a:lstStyle/>
+          <a:p>
+            <a:r>
+              <a:t>Extracción de importancia de variables</a:t>
+            </a:r>
+          </a:p>
+          <a:p>
+            <a:pPr lvl="1"/>
+            <a:r>
+              <a:t>Top 15 features más influyentes</a:t>
+            </a:r>
+          </a:p>
+          <a:p>
+            <a:pPr lvl="1"/>
+            <a:r>
+              <a:t>Visualización mediante gráfico horizontal</a:t>
+            </a:r>
+          </a:p>
+          <a:p>
+            <a:pPr lvl="1"/>
+            <a:r>
+              <a:t>Interpretación del impacto en satisfacción</a:t>
+            </a:r>
+          </a:p>
+        </p:txBody>
+      </p:sp>
+    </p:spTree>
+  </p:cSld>
+  <p:clrMapOvr>
+    <a:masterClrMapping/>
+  </p:clrMapOvr>
+</p:sld>
+</file>
+
+<file path=ppt/slides/slide12.xml><?xml version="1.0" encoding="utf-8"?>
+<p:sld xmlns:a="http://schemas.openxmlformats.org/drawingml/2006/main" xmlns:r="http://schemas.openxmlformats.org/officeDocument/2006/relationships" xmlns:p="http://schemas.openxmlformats.org/presentationml/2006/main">
+  <p:cSld>
+    <p:spTree>
+      <p:nvGrpSpPr>
+        <p:cNvPr id="1" name=""/>
+        <p:cNvGrpSpPr/>
+        <p:nvPr/>
+      </p:nvGrpSpPr>
+      <p:grpSpPr>
+        <a:xfrm>
+          <a:off x="0" y="0"/>
+          <a:ext cx="0" cy="0"/>
+          <a:chOff x="0" y="0"/>
+          <a:chExt cx="0" cy="0"/>
+        </a:xfrm>
+      </p:grpSpPr>
+      <p:sp>
+        <p:nvSpPr>
+          <p:cNvPr id="2" name="Title 1"/>
+          <p:cNvSpPr>
+            <a:spLocks noGrp="1"/>
+          </p:cNvSpPr>
+          <p:nvPr>
+            <p:ph type="title"/>
+          </p:nvPr>
+        </p:nvSpPr>
+        <p:spPr/>
+        <p:txBody>
+          <a:bodyPr/>
+          <a:lstStyle/>
+          <a:p>
+            <a:r>
               <a:t>Análisis de Probabilidades</a:t>
             </a:r>
           </a:p>
@@ -6204,7 +6369,7 @@
 </p:sld>
 </file>
 
-<file path=ppt/slides/slide11.xml><?xml version="1.0" encoding="utf-8"?>
+<file path=ppt/slides/slide13.xml><?xml version="1.0" encoding="utf-8"?>
 <p:sld xmlns:a="http://schemas.openxmlformats.org/drawingml/2006/main" xmlns:r="http://schemas.openxmlformats.org/officeDocument/2006/relationships" xmlns:p="http://schemas.openxmlformats.org/presentationml/2006/main">
   <p:cSld>
     <p:spTree>
@@ -6573,6 +6738,367 @@
 </file>
 
 <file path=ppt/slides/slide5.xml><?xml version="1.0" encoding="utf-8"?>
+<p:sld xmlns:a="http://schemas.openxmlformats.org/drawingml/2006/main" xmlns:r="http://schemas.openxmlformats.org/officeDocument/2006/relationships" xmlns:p="http://schemas.openxmlformats.org/presentationml/2006/main">
+  <p:cSld>
+    <p:spTree>
+      <p:nvGrpSpPr>
+        <p:cNvPr id="1" name=""/>
+        <p:cNvGrpSpPr/>
+        <p:nvPr/>
+      </p:nvGrpSpPr>
+      <p:grpSpPr>
+        <a:xfrm>
+          <a:off x="0" y="0"/>
+          <a:ext cx="0" cy="0"/>
+          <a:chOff x="0" y="0"/>
+          <a:chExt cx="0" cy="0"/>
+        </a:xfrm>
+      </p:grpSpPr>
+      <p:sp>
+        <p:nvSpPr>
+          <p:cNvPr id="2" name="Título 1">
+            <a:extLst>
+              <a:ext uri="{FF2B5EF4-FFF2-40B4-BE49-F238E27FC236}">
+                <a16:creationId xmlns:a16="http://schemas.microsoft.com/office/drawing/2014/main" id="{BF862DDC-4C01-8B08-B811-DB0BDCA69F63}"/>
+              </a:ext>
+            </a:extLst>
+          </p:cNvPr>
+          <p:cNvSpPr>
+            <a:spLocks noGrp="1"/>
+          </p:cNvSpPr>
+          <p:nvPr>
+            <p:ph type="title"/>
+          </p:nvPr>
+        </p:nvSpPr>
+        <p:spPr/>
+        <p:txBody>
+          <a:bodyPr/>
+          <a:lstStyle/>
+          <a:p>
+            <a:r>
+              <a:rPr lang="es-ES" dirty="0"/>
+              <a:t>Pipeline de Procesamiento de Datos</a:t>
+            </a:r>
+          </a:p>
+        </p:txBody>
+      </p:sp>
+      <p:sp>
+        <p:nvSpPr>
+          <p:cNvPr id="3" name="Marcador de contenido 2">
+            <a:extLst>
+              <a:ext uri="{FF2B5EF4-FFF2-40B4-BE49-F238E27FC236}">
+                <a16:creationId xmlns:a16="http://schemas.microsoft.com/office/drawing/2014/main" id="{4E6034CB-D7B0-6DD4-76CF-9B1D5A891952}"/>
+              </a:ext>
+            </a:extLst>
+          </p:cNvPr>
+          <p:cNvSpPr>
+            <a:spLocks noGrp="1"/>
+          </p:cNvSpPr>
+          <p:nvPr>
+            <p:ph idx="1"/>
+          </p:nvPr>
+        </p:nvSpPr>
+        <p:spPr/>
+        <p:txBody>
+          <a:bodyPr/>
+          <a:lstStyle/>
+          <a:p>
+            <a:r>
+              <a:rPr lang="es-ES" dirty="0"/>
+              <a:t>Implementación de </a:t>
+            </a:r>
+            <a:r>
+              <a:rPr lang="es-ES" dirty="0" err="1"/>
+              <a:t>ColumnTransformer</a:t>
+            </a:r>
+            <a:r>
+              <a:rPr lang="es-ES" dirty="0"/>
+              <a:t>: Tratamiento diferenciado por tipo de variable en un solo flujo atómico.</a:t>
+            </a:r>
+          </a:p>
+          <a:p>
+            <a:r>
+              <a:rPr lang="es-ES" dirty="0"/>
+              <a:t>Bloque Numérico:</a:t>
+            </a:r>
+          </a:p>
+          <a:p>
+            <a:pPr lvl="1"/>
+            <a:r>
+              <a:rPr lang="es-ES" dirty="0"/>
+              <a:t>Imputación: Manejo de valores nulos en </a:t>
+            </a:r>
+            <a:r>
+              <a:rPr lang="es-ES" dirty="0" err="1"/>
+              <a:t>Arrival</a:t>
+            </a:r>
+            <a:r>
+              <a:rPr lang="es-ES" dirty="0"/>
+              <a:t> </a:t>
+            </a:r>
+            <a:r>
+              <a:rPr lang="es-ES" dirty="0" err="1"/>
+              <a:t>Delay</a:t>
+            </a:r>
+            <a:r>
+              <a:rPr lang="es-ES" dirty="0"/>
+              <a:t> utilizando la mediana para mitigar el impacto de </a:t>
+            </a:r>
+            <a:r>
+              <a:rPr lang="es-ES" dirty="0" err="1"/>
+              <a:t>outliers</a:t>
+            </a:r>
+            <a:r>
+              <a:rPr lang="es-ES" dirty="0"/>
+              <a:t>.</a:t>
+            </a:r>
+          </a:p>
+          <a:p>
+            <a:pPr lvl="1"/>
+            <a:r>
+              <a:rPr lang="es-ES" dirty="0"/>
+              <a:t>Escalado: Uso de </a:t>
+            </a:r>
+            <a:r>
+              <a:rPr lang="es-ES" dirty="0" err="1"/>
+              <a:t>StandardScaler</a:t>
+            </a:r>
+            <a:r>
+              <a:rPr lang="es-ES" dirty="0"/>
+              <a:t> para normalizar magnitudes (Edad, Distancia) y equilibrar el peso de las </a:t>
+            </a:r>
+            <a:r>
+              <a:rPr lang="es-ES" dirty="0" err="1"/>
+              <a:t>features</a:t>
+            </a:r>
+            <a:r>
+              <a:rPr lang="es-ES" dirty="0"/>
+              <a:t>.</a:t>
+            </a:r>
+          </a:p>
+          <a:p>
+            <a:r>
+              <a:rPr lang="es-ES" dirty="0"/>
+              <a:t>Bloque </a:t>
+            </a:r>
+            <a:r>
+              <a:rPr lang="es-ES" dirty="0" err="1"/>
+              <a:t>Categórico:Encoding</a:t>
+            </a:r>
+            <a:r>
+              <a:rPr lang="es-ES" dirty="0"/>
+              <a:t>: Aplicación de </a:t>
+            </a:r>
+            <a:r>
+              <a:rPr lang="es-ES" dirty="0" err="1"/>
+              <a:t>OneHotEncoder</a:t>
+            </a:r>
+            <a:r>
+              <a:rPr lang="es-ES" dirty="0"/>
+              <a:t> para convertir variables de texto (</a:t>
+            </a:r>
+            <a:r>
+              <a:rPr lang="es-ES" dirty="0" err="1"/>
+              <a:t>Class</a:t>
+            </a:r>
+            <a:r>
+              <a:rPr lang="es-ES" dirty="0"/>
+              <a:t>, </a:t>
+            </a:r>
+            <a:r>
+              <a:rPr lang="es-ES" dirty="0" err="1"/>
+              <a:t>Type</a:t>
+            </a:r>
+            <a:r>
+              <a:rPr lang="es-ES" dirty="0"/>
+              <a:t> </a:t>
+            </a:r>
+            <a:r>
+              <a:rPr lang="es-ES" dirty="0" err="1"/>
+              <a:t>of</a:t>
+            </a:r>
+            <a:r>
+              <a:rPr lang="es-ES" dirty="0"/>
+              <a:t> </a:t>
+            </a:r>
+            <a:r>
+              <a:rPr lang="es-ES" dirty="0" err="1"/>
+              <a:t>Travel</a:t>
+            </a:r>
+            <a:r>
+              <a:rPr lang="es-ES" dirty="0"/>
+              <a:t>) en vectores numéricos </a:t>
+            </a:r>
+            <a:r>
+              <a:rPr lang="es-ES" dirty="0" err="1"/>
+              <a:t>procesables.Garantía</a:t>
+            </a:r>
+            <a:r>
+              <a:rPr lang="es-ES" dirty="0"/>
+              <a:t> Técnica: Eliminación de riesgos de Data </a:t>
+            </a:r>
+            <a:r>
+              <a:rPr lang="es-ES" dirty="0" err="1"/>
+              <a:t>Leakage</a:t>
+            </a:r>
+            <a:r>
+              <a:rPr lang="es-ES" dirty="0"/>
+              <a:t> al ajustar las transformaciones exclusivamente con los datos de entrenamiento.</a:t>
+            </a:r>
+          </a:p>
+        </p:txBody>
+      </p:sp>
+    </p:spTree>
+    <p:extLst>
+      <p:ext uri="{BB962C8B-B14F-4D97-AF65-F5344CB8AC3E}">
+        <p14:creationId xmlns:p14="http://schemas.microsoft.com/office/powerpoint/2010/main" val="1586506381"/>
+      </p:ext>
+    </p:extLst>
+  </p:cSld>
+  <p:clrMapOvr>
+    <a:masterClrMapping/>
+  </p:clrMapOvr>
+</p:sld>
+</file>
+
+<file path=ppt/slides/slide6.xml><?xml version="1.0" encoding="utf-8"?>
+<p:sld xmlns:a="http://schemas.openxmlformats.org/drawingml/2006/main" xmlns:r="http://schemas.openxmlformats.org/officeDocument/2006/relationships" xmlns:p="http://schemas.openxmlformats.org/presentationml/2006/main">
+  <p:cSld>
+    <p:spTree>
+      <p:nvGrpSpPr>
+        <p:cNvPr id="1" name=""/>
+        <p:cNvGrpSpPr/>
+        <p:nvPr/>
+      </p:nvGrpSpPr>
+      <p:grpSpPr>
+        <a:xfrm>
+          <a:off x="0" y="0"/>
+          <a:ext cx="0" cy="0"/>
+          <a:chOff x="0" y="0"/>
+          <a:chExt cx="0" cy="0"/>
+        </a:xfrm>
+      </p:grpSpPr>
+      <p:sp>
+        <p:nvSpPr>
+          <p:cNvPr id="2" name="Título 1">
+            <a:extLst>
+              <a:ext uri="{FF2B5EF4-FFF2-40B4-BE49-F238E27FC236}">
+                <a16:creationId xmlns:a16="http://schemas.microsoft.com/office/drawing/2014/main" id="{89EAAC37-9EAF-3F24-F876-07F3721BD861}"/>
+              </a:ext>
+            </a:extLst>
+          </p:cNvPr>
+          <p:cNvSpPr>
+            <a:spLocks noGrp="1"/>
+          </p:cNvSpPr>
+          <p:nvPr>
+            <p:ph type="title"/>
+          </p:nvPr>
+        </p:nvSpPr>
+        <p:spPr/>
+        <p:txBody>
+          <a:bodyPr/>
+          <a:lstStyle/>
+          <a:p>
+            <a:r>
+              <a:rPr lang="es-ES" dirty="0"/>
+              <a:t>Automatización y Robustez</a:t>
+            </a:r>
+          </a:p>
+        </p:txBody>
+      </p:sp>
+      <p:sp>
+        <p:nvSpPr>
+          <p:cNvPr id="3" name="Marcador de contenido 2">
+            <a:extLst>
+              <a:ext uri="{FF2B5EF4-FFF2-40B4-BE49-F238E27FC236}">
+                <a16:creationId xmlns:a16="http://schemas.microsoft.com/office/drawing/2014/main" id="{62CAA3A7-5631-EED1-F6FD-4E9427268B87}"/>
+              </a:ext>
+            </a:extLst>
+          </p:cNvPr>
+          <p:cNvSpPr>
+            <a:spLocks noGrp="1"/>
+          </p:cNvSpPr>
+          <p:nvPr>
+            <p:ph idx="1"/>
+          </p:nvPr>
+        </p:nvSpPr>
+        <p:spPr/>
+        <p:txBody>
+          <a:bodyPr>
+            <a:normAutofit lnSpcReduction="10000"/>
+          </a:bodyPr>
+          <a:lstStyle/>
+          <a:p>
+            <a:r>
+              <a:rPr lang="es-ES" dirty="0"/>
+              <a:t>Integración Modelo-Preprocesado: El modelo </a:t>
+            </a:r>
+            <a:r>
+              <a:rPr lang="es-ES" dirty="0" err="1"/>
+              <a:t>Random</a:t>
+            </a:r>
+            <a:r>
+              <a:rPr lang="es-ES" dirty="0"/>
+              <a:t> Forest se integra directamente al final del Pipeline, creando un objeto de predicción "llave en mano".</a:t>
+            </a:r>
+          </a:p>
+          <a:p>
+            <a:r>
+              <a:rPr lang="es-ES" dirty="0"/>
+              <a:t>Consistencia de Datos: Asegura que los datos de Test pasen exactamente por el mismo proceso que los de Train, evitando errores de formato o dimensiones.</a:t>
+            </a:r>
+          </a:p>
+          <a:p>
+            <a:r>
+              <a:rPr lang="es-ES" dirty="0"/>
+              <a:t>Persistencia con </a:t>
+            </a:r>
+            <a:r>
+              <a:rPr lang="es-ES" dirty="0" err="1"/>
+              <a:t>Joblib</a:t>
+            </a:r>
+            <a:r>
+              <a:rPr lang="es-ES" dirty="0"/>
+              <a:t>: Exportación del sistema completo a un archivo binario .</a:t>
+            </a:r>
+            <a:r>
+              <a:rPr lang="es-ES" dirty="0" err="1"/>
+              <a:t>joblib</a:t>
+            </a:r>
+            <a:r>
+              <a:rPr lang="es-ES" dirty="0"/>
+              <a:t>.</a:t>
+            </a:r>
+          </a:p>
+          <a:p>
+            <a:pPr lvl="1"/>
+            <a:r>
+              <a:rPr lang="es-ES" dirty="0"/>
+              <a:t>Permite cargar en segundos todo el conocimiento: escalas, categorías y pesos del modelo.</a:t>
+            </a:r>
+          </a:p>
+          <a:p>
+            <a:r>
+              <a:rPr lang="es-ES" dirty="0"/>
+              <a:t>Escalabilidad: Sistema preparado para inferencia inmediata sobre datos en bruto (Raw Data), facilitando su despliegue en entornos reales.</a:t>
+            </a:r>
+          </a:p>
+        </p:txBody>
+      </p:sp>
+    </p:spTree>
+    <p:extLst>
+      <p:ext uri="{BB962C8B-B14F-4D97-AF65-F5344CB8AC3E}">
+        <p14:creationId xmlns:p14="http://schemas.microsoft.com/office/powerpoint/2010/main" val="3637178671"/>
+      </p:ext>
+    </p:extLst>
+  </p:cSld>
+  <p:clrMapOvr>
+    <a:masterClrMapping/>
+  </p:clrMapOvr>
+</p:sld>
+</file>
+
+<file path=ppt/slides/slide7.xml><?xml version="1.0" encoding="utf-8"?>
 <p:sld xmlns:a="http://schemas.openxmlformats.org/drawingml/2006/main" xmlns:r="http://schemas.openxmlformats.org/officeDocument/2006/relationships" xmlns:p="http://schemas.openxmlformats.org/presentationml/2006/main">
   <p:cSld>
     <p:spTree>
@@ -6680,7 +7206,7 @@
 </p:sld>
 </file>
 
-<file path=ppt/slides/slide6.xml><?xml version="1.0" encoding="utf-8"?>
+<file path=ppt/slides/slide8.xml><?xml version="1.0" encoding="utf-8"?>
 <p:sld xmlns:a="http://schemas.openxmlformats.org/drawingml/2006/main" xmlns:r="http://schemas.openxmlformats.org/officeDocument/2006/relationships" xmlns:p="http://schemas.openxmlformats.org/presentationml/2006/main">
   <p:cSld>
     <p:spTree>
@@ -6799,7 +7325,7 @@
 </p:sld>
 </file>
 
-<file path=ppt/slides/slide7.xml><?xml version="1.0" encoding="utf-8"?>
+<file path=ppt/slides/slide9.xml><?xml version="1.0" encoding="utf-8"?>
 <p:sld xmlns:a="http://schemas.openxmlformats.org/drawingml/2006/main" xmlns:r="http://schemas.openxmlformats.org/officeDocument/2006/relationships" xmlns:p="http://schemas.openxmlformats.org/presentationml/2006/main">
   <p:cSld>
     <p:spTree>
@@ -6910,169 +7436,6 @@
           </a:prstGeom>
         </p:spPr>
       </p:pic>
-    </p:spTree>
-  </p:cSld>
-  <p:clrMapOvr>
-    <a:masterClrMapping/>
-  </p:clrMapOvr>
-</p:sld>
-</file>
-
-<file path=ppt/slides/slide8.xml><?xml version="1.0" encoding="utf-8"?>
-<p:sld xmlns:a="http://schemas.openxmlformats.org/drawingml/2006/main" xmlns:r="http://schemas.openxmlformats.org/officeDocument/2006/relationships" xmlns:p="http://schemas.openxmlformats.org/presentationml/2006/main">
-  <p:cSld>
-    <p:spTree>
-      <p:nvGrpSpPr>
-        <p:cNvPr id="1" name=""/>
-        <p:cNvGrpSpPr/>
-        <p:nvPr/>
-      </p:nvGrpSpPr>
-      <p:grpSpPr>
-        <a:xfrm>
-          <a:off x="0" y="0"/>
-          <a:ext cx="0" cy="0"/>
-          <a:chOff x="0" y="0"/>
-          <a:chExt cx="0" cy="0"/>
-        </a:xfrm>
-      </p:grpSpPr>
-      <p:sp>
-        <p:nvSpPr>
-          <p:cNvPr id="2" name="Title 1"/>
-          <p:cNvSpPr>
-            <a:spLocks noGrp="1"/>
-          </p:cNvSpPr>
-          <p:nvPr>
-            <p:ph type="title"/>
-          </p:nvPr>
-        </p:nvSpPr>
-        <p:spPr/>
-        <p:txBody>
-          <a:bodyPr/>
-          <a:lstStyle/>
-          <a:p>
-            <a:r>
-              <a:t>Evaluación Final</a:t>
-            </a:r>
-          </a:p>
-        </p:txBody>
-      </p:sp>
-      <p:pic>
-        <p:nvPicPr>
-          <p:cNvPr id="7" name="Marcador de contenido 6">
-            <a:extLst>
-              <a:ext uri="{FF2B5EF4-FFF2-40B4-BE49-F238E27FC236}">
-                <a16:creationId xmlns:a16="http://schemas.microsoft.com/office/drawing/2014/main" id="{F18DA9D7-CACF-B58D-BC34-B3C3EF667FFC}"/>
-              </a:ext>
-            </a:extLst>
-          </p:cNvPr>
-          <p:cNvPicPr>
-            <a:picLocks noGrp="1" noChangeAspect="1"/>
-          </p:cNvPicPr>
-          <p:nvPr>
-            <p:ph idx="1"/>
-          </p:nvPr>
-        </p:nvPicPr>
-        <p:blipFill>
-          <a:blip r:embed="rId2"/>
-          <a:stretch>
-            <a:fillRect/>
-          </a:stretch>
-        </p:blipFill>
-        <p:spPr>
-          <a:xfrm>
-            <a:off x="1927797" y="1669948"/>
-            <a:ext cx="5288406" cy="4592034"/>
-          </a:xfrm>
-          <a:prstGeom prst="rect">
-            <a:avLst/>
-          </a:prstGeom>
-        </p:spPr>
-      </p:pic>
-    </p:spTree>
-  </p:cSld>
-  <p:clrMapOvr>
-    <a:masterClrMapping/>
-  </p:clrMapOvr>
-</p:sld>
-</file>
-
-<file path=ppt/slides/slide9.xml><?xml version="1.0" encoding="utf-8"?>
-<p:sld xmlns:a="http://schemas.openxmlformats.org/drawingml/2006/main" xmlns:r="http://schemas.openxmlformats.org/officeDocument/2006/relationships" xmlns:p="http://schemas.openxmlformats.org/presentationml/2006/main">
-  <p:cSld>
-    <p:spTree>
-      <p:nvGrpSpPr>
-        <p:cNvPr id="1" name=""/>
-        <p:cNvGrpSpPr/>
-        <p:nvPr/>
-      </p:nvGrpSpPr>
-      <p:grpSpPr>
-        <a:xfrm>
-          <a:off x="0" y="0"/>
-          <a:ext cx="0" cy="0"/>
-          <a:chOff x="0" y="0"/>
-          <a:chExt cx="0" cy="0"/>
-        </a:xfrm>
-      </p:grpSpPr>
-      <p:sp>
-        <p:nvSpPr>
-          <p:cNvPr id="2" name="Title 1"/>
-          <p:cNvSpPr>
-            <a:spLocks noGrp="1"/>
-          </p:cNvSpPr>
-          <p:nvPr>
-            <p:ph type="title"/>
-          </p:nvPr>
-        </p:nvSpPr>
-        <p:spPr/>
-        <p:txBody>
-          <a:bodyPr/>
-          <a:lstStyle/>
-          <a:p>
-            <a:r>
-              <a:t>Feature Importance</a:t>
-            </a:r>
-          </a:p>
-        </p:txBody>
-      </p:sp>
-      <p:sp>
-        <p:nvSpPr>
-          <p:cNvPr id="3" name="Content Placeholder 2"/>
-          <p:cNvSpPr>
-            <a:spLocks noGrp="1"/>
-          </p:cNvSpPr>
-          <p:nvPr>
-            <p:ph idx="1"/>
-          </p:nvPr>
-        </p:nvSpPr>
-        <p:spPr/>
-        <p:txBody>
-          <a:bodyPr/>
-          <a:lstStyle/>
-          <a:p>
-            <a:r>
-              <a:t>Extracción de importancia de variables</a:t>
-            </a:r>
-          </a:p>
-          <a:p>
-            <a:pPr lvl="1"/>
-            <a:r>
-              <a:t>Top 15 features más influyentes</a:t>
-            </a:r>
-          </a:p>
-          <a:p>
-            <a:pPr lvl="1"/>
-            <a:r>
-              <a:t>Visualización mediante gráfico horizontal</a:t>
-            </a:r>
-          </a:p>
-          <a:p>
-            <a:pPr lvl="1"/>
-            <a:r>
-              <a:t>Interpretación del impacto en satisfacción</a:t>
-            </a:r>
-          </a:p>
-        </p:txBody>
-      </p:sp>
     </p:spTree>
   </p:cSld>
   <p:clrMapOvr>

--- a/Presentación.pptx
+++ b/Presentación.pptx
@@ -348,7 +348,7 @@
           <a:p>
             <a:fld id="{5BCAD085-E8A6-8845-BD4E-CB4CCA059FC4}" type="datetimeFigureOut">
               <a:rPr lang="en-US" smtClean="0"/>
-              <a:t>3/5/2026</a:t>
+              <a:t>3/7/2026</a:t>
             </a:fld>
             <a:endParaRPr lang="en-US"/>
           </a:p>
@@ -639,7 +639,7 @@
           <a:p>
             <a:fld id="{5BCAD085-E8A6-8845-BD4E-CB4CCA059FC4}" type="datetimeFigureOut">
               <a:rPr lang="en-US" smtClean="0"/>
-              <a:t>3/5/2026</a:t>
+              <a:t>3/7/2026</a:t>
             </a:fld>
             <a:endParaRPr lang="en-US"/>
           </a:p>
@@ -903,7 +903,7 @@
           <a:p>
             <a:fld id="{5BCAD085-E8A6-8845-BD4E-CB4CCA059FC4}" type="datetimeFigureOut">
               <a:rPr lang="en-US" smtClean="0"/>
-              <a:t>3/5/2026</a:t>
+              <a:t>3/7/2026</a:t>
             </a:fld>
             <a:endParaRPr lang="en-US"/>
           </a:p>
@@ -1463,7 +1463,7 @@
           <a:p>
             <a:fld id="{5BCAD085-E8A6-8845-BD4E-CB4CCA059FC4}" type="datetimeFigureOut">
               <a:rPr lang="en-US" smtClean="0"/>
-              <a:t>3/5/2026</a:t>
+              <a:t>3/7/2026</a:t>
             </a:fld>
             <a:endParaRPr lang="en-US"/>
           </a:p>
@@ -1722,7 +1722,7 @@
           <a:p>
             <a:fld id="{5BCAD085-E8A6-8845-BD4E-CB4CCA059FC4}" type="datetimeFigureOut">
               <a:rPr lang="en-US" smtClean="0"/>
-              <a:t>3/5/2026</a:t>
+              <a:t>3/7/2026</a:t>
             </a:fld>
             <a:endParaRPr lang="en-US"/>
           </a:p>
@@ -2298,7 +2298,7 @@
           <a:p>
             <a:fld id="{5BCAD085-E8A6-8845-BD4E-CB4CCA059FC4}" type="datetimeFigureOut">
               <a:rPr lang="en-US" smtClean="0"/>
-              <a:t>3/5/2026</a:t>
+              <a:t>3/7/2026</a:t>
             </a:fld>
             <a:endParaRPr lang="en-US"/>
           </a:p>
@@ -2630,7 +2630,7 @@
           <a:p>
             <a:fld id="{5BCAD085-E8A6-8845-BD4E-CB4CCA059FC4}" type="datetimeFigureOut">
               <a:rPr lang="en-US" smtClean="0"/>
-              <a:t>3/5/2026</a:t>
+              <a:t>3/7/2026</a:t>
             </a:fld>
             <a:endParaRPr lang="en-US"/>
           </a:p>
@@ -2805,7 +2805,7 @@
           <a:p>
             <a:fld id="{5BCAD085-E8A6-8845-BD4E-CB4CCA059FC4}" type="datetimeFigureOut">
               <a:rPr lang="en-US" smtClean="0"/>
-              <a:t>3/5/2026</a:t>
+              <a:t>3/7/2026</a:t>
             </a:fld>
             <a:endParaRPr lang="en-US"/>
           </a:p>
@@ -2985,7 +2985,7 @@
           <a:p>
             <a:fld id="{5BCAD085-E8A6-8845-BD4E-CB4CCA059FC4}" type="datetimeFigureOut">
               <a:rPr lang="en-US" smtClean="0"/>
-              <a:t>3/5/2026</a:t>
+              <a:t>3/7/2026</a:t>
             </a:fld>
             <a:endParaRPr lang="en-US"/>
           </a:p>
@@ -3155,7 +3155,7 @@
           <a:p>
             <a:fld id="{5BCAD085-E8A6-8845-BD4E-CB4CCA059FC4}" type="datetimeFigureOut">
               <a:rPr lang="en-US" smtClean="0"/>
-              <a:t>3/5/2026</a:t>
+              <a:t>3/7/2026</a:t>
             </a:fld>
             <a:endParaRPr lang="en-US"/>
           </a:p>
@@ -3414,7 +3414,7 @@
           <a:p>
             <a:fld id="{5BCAD085-E8A6-8845-BD4E-CB4CCA059FC4}" type="datetimeFigureOut">
               <a:rPr lang="en-US" smtClean="0"/>
-              <a:t>3/5/2026</a:t>
+              <a:t>3/7/2026</a:t>
             </a:fld>
             <a:endParaRPr lang="en-US"/>
           </a:p>
@@ -3706,7 +3706,7 @@
           <a:p>
             <a:fld id="{5BCAD085-E8A6-8845-BD4E-CB4CCA059FC4}" type="datetimeFigureOut">
               <a:rPr lang="en-US" smtClean="0"/>
-              <a:t>3/5/2026</a:t>
+              <a:t>3/7/2026</a:t>
             </a:fld>
             <a:endParaRPr lang="en-US"/>
           </a:p>
@@ -4136,7 +4136,7 @@
           <a:p>
             <a:fld id="{5BCAD085-E8A6-8845-BD4E-CB4CCA059FC4}" type="datetimeFigureOut">
               <a:rPr lang="en-US" smtClean="0"/>
-              <a:t>3/5/2026</a:t>
+              <a:t>3/7/2026</a:t>
             </a:fld>
             <a:endParaRPr lang="en-US"/>
           </a:p>
@@ -4260,7 +4260,7 @@
           <a:p>
             <a:fld id="{5BCAD085-E8A6-8845-BD4E-CB4CCA059FC4}" type="datetimeFigureOut">
               <a:rPr lang="en-US" smtClean="0"/>
-              <a:t>3/5/2026</a:t>
+              <a:t>3/7/2026</a:t>
             </a:fld>
             <a:endParaRPr lang="en-US"/>
           </a:p>
@@ -4355,7 +4355,7 @@
           <a:p>
             <a:fld id="{5BCAD085-E8A6-8845-BD4E-CB4CCA059FC4}" type="datetimeFigureOut">
               <a:rPr lang="en-US" smtClean="0"/>
-              <a:t>3/5/2026</a:t>
+              <a:t>3/7/2026</a:t>
             </a:fld>
             <a:endParaRPr lang="en-US"/>
           </a:p>
@@ -4638,7 +4638,7 @@
           <a:p>
             <a:fld id="{5BCAD085-E8A6-8845-BD4E-CB4CCA059FC4}" type="datetimeFigureOut">
               <a:rPr lang="en-US" smtClean="0"/>
-              <a:t>3/5/2026</a:t>
+              <a:t>3/7/2026</a:t>
             </a:fld>
             <a:endParaRPr lang="en-US"/>
           </a:p>
@@ -4929,7 +4929,7 @@
           <a:p>
             <a:fld id="{5BCAD085-E8A6-8845-BD4E-CB4CCA059FC4}" type="datetimeFigureOut">
               <a:rPr lang="en-US" smtClean="0"/>
-              <a:t>3/5/2026</a:t>
+              <a:t>3/7/2026</a:t>
             </a:fld>
             <a:endParaRPr lang="en-US"/>
           </a:p>
@@ -5160,7 +5160,7 @@
           <a:p>
             <a:fld id="{5BCAD085-E8A6-8845-BD4E-CB4CCA059FC4}" type="datetimeFigureOut">
               <a:rPr lang="en-US" smtClean="0"/>
-              <a:t>3/5/2026</a:t>
+              <a:t>3/7/2026</a:t>
             </a:fld>
             <a:endParaRPr lang="en-US"/>
           </a:p>
@@ -6031,19 +6031,17 @@
       </p:sp>
       <p:pic>
         <p:nvPicPr>
-          <p:cNvPr id="7" name="Marcador de contenido 6">
+          <p:cNvPr id="6" name="Imagen 5">
             <a:extLst>
               <a:ext uri="{FF2B5EF4-FFF2-40B4-BE49-F238E27FC236}">
-                <a16:creationId xmlns:a16="http://schemas.microsoft.com/office/drawing/2014/main" id="{F18DA9D7-CACF-B58D-BC34-B3C3EF667FFC}"/>
+                <a16:creationId xmlns:a16="http://schemas.microsoft.com/office/drawing/2014/main" id="{12F907CB-9EA4-6E81-A871-34043291A621}"/>
               </a:ext>
             </a:extLst>
           </p:cNvPr>
           <p:cNvPicPr>
-            <a:picLocks noGrp="1" noChangeAspect="1"/>
+            <a:picLocks noChangeAspect="1"/>
           </p:cNvPicPr>
-          <p:nvPr>
-            <p:ph idx="1"/>
-          </p:nvPr>
+          <p:nvPr/>
         </p:nvPicPr>
         <p:blipFill>
           <a:blip r:embed="rId2"/>
@@ -6053,8 +6051,8 @@
         </p:blipFill>
         <p:spPr>
           <a:xfrm>
-            <a:off x="1927797" y="1669948"/>
-            <a:ext cx="5288406" cy="4592034"/>
+            <a:off x="932688" y="2141661"/>
+            <a:ext cx="7278624" cy="3265177"/>
           </a:xfrm>
           <a:prstGeom prst="rect">
             <a:avLst/>
